--- a/src/main/java/resumepreparation/46332100_RAJESH_KUMAR_(Banking_and_Payments).pptx
+++ b/src/main/java/resumepreparation/46332100_RAJESH_KUMAR_(Banking_and_Payments).pptx
@@ -242,7 +242,7 @@
           <a:p>
             <a:fld id="{1BE064A6-65E4-4129-AF84-9BF543EF8787}" type="datetimeFigureOut">
               <a:rPr lang="en-IN" smtClean="0"/>
-              <a:t>09-10-2025</a:t>
+              <a:t>17-04-2026</a:t>
             </a:fld>
             <a:endParaRPr lang="en-IN"/>
           </a:p>
@@ -743,7 +743,7 @@
           <a:p>
             <a:fld id="{105578E0-FCB6-42C3-ADF0-A28E79A947A9}" type="datetimeFigureOut">
               <a:rPr lang="en-IN" smtClean="0"/>
-              <a:t>09-10-2025</a:t>
+              <a:t>17-04-2026</a:t>
             </a:fld>
             <a:endParaRPr lang="en-IN"/>
           </a:p>
@@ -943,7 +943,7 @@
           <a:p>
             <a:fld id="{105578E0-FCB6-42C3-ADF0-A28E79A947A9}" type="datetimeFigureOut">
               <a:rPr lang="en-IN" smtClean="0"/>
-              <a:t>09-10-2025</a:t>
+              <a:t>17-04-2026</a:t>
             </a:fld>
             <a:endParaRPr lang="en-IN"/>
           </a:p>
@@ -1153,7 +1153,7 @@
           <a:p>
             <a:fld id="{105578E0-FCB6-42C3-ADF0-A28E79A947A9}" type="datetimeFigureOut">
               <a:rPr lang="en-IN" smtClean="0"/>
-              <a:t>09-10-2025</a:t>
+              <a:t>17-04-2026</a:t>
             </a:fld>
             <a:endParaRPr lang="en-IN"/>
           </a:p>
@@ -1353,7 +1353,7 @@
           <a:p>
             <a:fld id="{105578E0-FCB6-42C3-ADF0-A28E79A947A9}" type="datetimeFigureOut">
               <a:rPr lang="en-IN" smtClean="0"/>
-              <a:t>09-10-2025</a:t>
+              <a:t>17-04-2026</a:t>
             </a:fld>
             <a:endParaRPr lang="en-IN"/>
           </a:p>
@@ -1629,7 +1629,7 @@
           <a:p>
             <a:fld id="{105578E0-FCB6-42C3-ADF0-A28E79A947A9}" type="datetimeFigureOut">
               <a:rPr lang="en-IN" smtClean="0"/>
-              <a:t>09-10-2025</a:t>
+              <a:t>17-04-2026</a:t>
             </a:fld>
             <a:endParaRPr lang="en-IN"/>
           </a:p>
@@ -1897,7 +1897,7 @@
           <a:p>
             <a:fld id="{105578E0-FCB6-42C3-ADF0-A28E79A947A9}" type="datetimeFigureOut">
               <a:rPr lang="en-IN" smtClean="0"/>
-              <a:t>09-10-2025</a:t>
+              <a:t>17-04-2026</a:t>
             </a:fld>
             <a:endParaRPr lang="en-IN"/>
           </a:p>
@@ -2312,7 +2312,7 @@
           <a:p>
             <a:fld id="{105578E0-FCB6-42C3-ADF0-A28E79A947A9}" type="datetimeFigureOut">
               <a:rPr lang="en-IN" smtClean="0"/>
-              <a:t>09-10-2025</a:t>
+              <a:t>17-04-2026</a:t>
             </a:fld>
             <a:endParaRPr lang="en-IN"/>
           </a:p>
@@ -2454,7 +2454,7 @@
           <a:p>
             <a:fld id="{105578E0-FCB6-42C3-ADF0-A28E79A947A9}" type="datetimeFigureOut">
               <a:rPr lang="en-IN" smtClean="0"/>
-              <a:t>09-10-2025</a:t>
+              <a:t>17-04-2026</a:t>
             </a:fld>
             <a:endParaRPr lang="en-IN"/>
           </a:p>
@@ -2567,7 +2567,7 @@
           <a:p>
             <a:fld id="{105578E0-FCB6-42C3-ADF0-A28E79A947A9}" type="datetimeFigureOut">
               <a:rPr lang="en-IN" smtClean="0"/>
-              <a:t>09-10-2025</a:t>
+              <a:t>17-04-2026</a:t>
             </a:fld>
             <a:endParaRPr lang="en-IN"/>
           </a:p>
@@ -2880,7 +2880,7 @@
           <a:p>
             <a:fld id="{105578E0-FCB6-42C3-ADF0-A28E79A947A9}" type="datetimeFigureOut">
               <a:rPr lang="en-IN" smtClean="0"/>
-              <a:t>09-10-2025</a:t>
+              <a:t>17-04-2026</a:t>
             </a:fld>
             <a:endParaRPr lang="en-IN"/>
           </a:p>
@@ -3169,7 +3169,7 @@
           <a:p>
             <a:fld id="{105578E0-FCB6-42C3-ADF0-A28E79A947A9}" type="datetimeFigureOut">
               <a:rPr lang="en-IN" smtClean="0"/>
-              <a:t>09-10-2025</a:t>
+              <a:t>17-04-2026</a:t>
             </a:fld>
             <a:endParaRPr lang="en-IN"/>
           </a:p>
@@ -3412,7 +3412,7 @@
           <a:p>
             <a:fld id="{105578E0-FCB6-42C3-ADF0-A28E79A947A9}" type="datetimeFigureOut">
               <a:rPr lang="en-IN" smtClean="0"/>
-              <a:t>09-10-2025</a:t>
+              <a:t>17-04-2026</a:t>
             </a:fld>
             <a:endParaRPr lang="en-IN"/>
           </a:p>
@@ -8832,6 +8832,6 @@
 
 <file path=docMetadata/LabelInfo.xml><?xml version="1.0" encoding="utf-8"?>
 <clbl:labelList xmlns:clbl="http://schemas.microsoft.com/office/2020/mipLabelMetadata">
-  <clbl:label id="{76a2ae5a-9f00-4f6b-95ed-5d33d77c4d61}" enabled="0" method="" siteId="{76a2ae5a-9f00-4f6b-95ed-5d33d77c4d61}" removed="1"/>
+  <clbl:label id="{e760c494-6550-44b4-8258-77c175d778b7}" enabled="1" method="Privileged" siteId="{76a2ae5a-9f00-4f6b-95ed-5d33d77c4d61}" contentBits="0" removed="0"/>
 </clbl:labelList>
 </file>